--- a/LandEvolve_Workflow.pptx
+++ b/LandEvolve_Workflow.pptx
@@ -13,6 +13,7 @@
     <p:sldId id="259" r:id="rId7"/>
     <p:sldId id="260" r:id="rId8"/>
     <p:sldId id="261" r:id="rId9"/>
+    <p:sldId id="270" r:id="rId20"/>
     <p:sldId id="262" r:id="rId10"/>
     <p:sldId id="263" r:id="rId11"/>
     <p:sldId id="264" r:id="rId12"/>
@@ -6491,7 +6492,7 @@
                 </a:solidFill>
                 <a:latin typeface="Calibri"/>
               </a:rPr>
-              <a:t>simulation_details.txt — parameters, components &amp; diagnostics.</a:t>
+              <a:t>simulation_details.txt — parameters, processes &amp; diagnostics.</a:t>
             </a:r>
           </a:p>
         </p:txBody>
@@ -7670,7 +7671,7 @@
                 </a:solidFill>
                 <a:latin typeface="Calibri"/>
               </a:rPr>
-              <a:t>Five steps, from map to insight.</a:t>
+              <a:t>Six steps, from map to insight.</a:t>
             </a:r>
           </a:p>
         </p:txBody>
@@ -7799,7 +7800,7 @@
                 </a:solidFill>
                 <a:latin typeface="Calibri"/>
               </a:rPr>
-              <a:t>Pick your DEM &amp; output folder</a:t>
+              <a:t>Pick your DEM</a:t>
             </a:r>
           </a:p>
         </p:txBody>
@@ -7812,7 +7813,7 @@
         </p:nvSpPr>
         <p:spPr>
           <a:xfrm>
-            <a:off x="868680" y="3355848"/>
+            <a:off x="868680" y="3258920"/>
             <a:ext cx="420624" cy="420624"/>
           </a:xfrm>
           <a:prstGeom prst="ellipse">
@@ -7857,7 +7858,7 @@
         </p:nvSpPr>
         <p:spPr>
           <a:xfrm>
-            <a:off x="868680" y="3355848"/>
+            <a:off x="868680" y="3258920"/>
             <a:ext cx="420624" cy="420624"/>
           </a:xfrm>
           <a:prstGeom prst="rect">
@@ -7899,7 +7900,7 @@
         </p:nvSpPr>
         <p:spPr>
           <a:xfrm>
-            <a:off x="1463040" y="3392424"/>
+            <a:off x="1463040" y="3295496"/>
             <a:ext cx="9875520" cy="411480"/>
           </a:xfrm>
           <a:prstGeom prst="rect">
@@ -7941,7 +7942,7 @@
         </p:nvSpPr>
         <p:spPr>
           <a:xfrm>
-            <a:off x="868680" y="3922776"/>
+            <a:off x="868680" y="3728920"/>
             <a:ext cx="420624" cy="420624"/>
           </a:xfrm>
           <a:prstGeom prst="ellipse">
@@ -7986,7 +7987,7 @@
         </p:nvSpPr>
         <p:spPr>
           <a:xfrm>
-            <a:off x="868680" y="3922776"/>
+            <a:off x="868680" y="3728920"/>
             <a:ext cx="420624" cy="420624"/>
           </a:xfrm>
           <a:prstGeom prst="rect">
@@ -8028,7 +8029,7 @@
         </p:nvSpPr>
         <p:spPr>
           <a:xfrm>
-            <a:off x="1463040" y="3959352"/>
+            <a:off x="1463040" y="3765496"/>
             <a:ext cx="9875520" cy="411480"/>
           </a:xfrm>
           <a:prstGeom prst="rect">
@@ -8070,7 +8071,7 @@
         </p:nvSpPr>
         <p:spPr>
           <a:xfrm>
-            <a:off x="868680" y="4489704"/>
+            <a:off x="868680" y="4198920"/>
             <a:ext cx="420624" cy="420624"/>
           </a:xfrm>
           <a:prstGeom prst="ellipse">
@@ -8115,7 +8116,7 @@
         </p:nvSpPr>
         <p:spPr>
           <a:xfrm>
-            <a:off x="868680" y="4489704"/>
+            <a:off x="868680" y="4198920"/>
             <a:ext cx="420624" cy="420624"/>
           </a:xfrm>
           <a:prstGeom prst="rect">
@@ -8157,7 +8158,7 @@
         </p:nvSpPr>
         <p:spPr>
           <a:xfrm>
-            <a:off x="1463040" y="4526280"/>
+            <a:off x="1463040" y="4235496"/>
             <a:ext cx="9875520" cy="411480"/>
           </a:xfrm>
           <a:prstGeom prst="rect">
@@ -8186,7 +8187,7 @@
                 </a:solidFill>
                 <a:latin typeface="Calibri"/>
               </a:rPr>
-              <a:t>Add &amp; configure the components</a:t>
+              <a:t>Add &amp; configure the processes</a:t>
             </a:r>
           </a:p>
         </p:txBody>
@@ -8199,7 +8200,7 @@
         </p:nvSpPr>
         <p:spPr>
           <a:xfrm>
-            <a:off x="868680" y="5056631"/>
+            <a:off x="868680" y="4668920"/>
             <a:ext cx="420624" cy="420624"/>
           </a:xfrm>
           <a:prstGeom prst="ellipse">
@@ -8244,7 +8245,7 @@
         </p:nvSpPr>
         <p:spPr>
           <a:xfrm>
-            <a:off x="868680" y="5056631"/>
+            <a:off x="868680" y="4668920"/>
             <a:ext cx="420624" cy="420624"/>
           </a:xfrm>
           <a:prstGeom prst="rect">
@@ -8286,7 +8287,7 @@
         </p:nvSpPr>
         <p:spPr>
           <a:xfrm>
-            <a:off x="1463040" y="5093207"/>
+            <a:off x="1463040" y="4705496"/>
             <a:ext cx="9875520" cy="411480"/>
           </a:xfrm>
           <a:prstGeom prst="rect">
@@ -8315,7 +8316,712 @@
                 </a:solidFill>
                 <a:latin typeface="Calibri"/>
               </a:rPr>
+              <a:t>Choose your output folder</a:t>
+            </a:r>
+          </a:p>
+        </p:txBody>
+      </p:sp>
+      <p:sp>
+        <p:nvSpPr>
+          <p:cNvPr id="22" name="Oval 21"/>
+          <p:cNvSpPr/>
+          <p:nvPr/>
+        </p:nvSpPr>
+        <p:spPr>
+          <a:xfrm>
+            <a:off x="868680" y="5138920"/>
+            <a:ext cx="420624" cy="420624"/>
+          </a:xfrm>
+          <a:prstGeom prst="ellipse">
+            <a:avLst/>
+          </a:prstGeom>
+          <a:solidFill>
+            <a:srgbClr val="8A6D4F"/>
+          </a:solidFill>
+          <a:ln>
+            <a:noFill/>
+          </a:ln>
+          <a:effectLst/>
+        </p:spPr>
+        <p:style>
+          <a:lnRef idx="1">
+            <a:schemeClr val="accent1"/>
+          </a:lnRef>
+          <a:fillRef idx="3">
+            <a:schemeClr val="accent1"/>
+          </a:fillRef>
+          <a:effectRef idx="2">
+            <a:schemeClr val="accent1"/>
+          </a:effectRef>
+          <a:fontRef idx="minor">
+            <a:schemeClr val="lt1"/>
+          </a:fontRef>
+        </p:style>
+        <p:txBody>
+          <a:bodyPr rtlCol="0" anchor="ctr"/>
+          <a:lstStyle/>
+          <a:p>
+            <a:pPr algn="ctr"/>
+            <a:endParaRPr/>
+          </a:p>
+        </p:txBody>
+      </p:sp>
+      <p:sp>
+        <p:nvSpPr>
+          <p:cNvPr id="23" name="TextBox 22"/>
+          <p:cNvSpPr txBox="1"/>
+          <p:nvPr/>
+        </p:nvSpPr>
+        <p:spPr>
+          <a:xfrm>
+            <a:off x="868680" y="5138920"/>
+            <a:ext cx="420624" cy="420624"/>
+          </a:xfrm>
+          <a:prstGeom prst="rect">
+            <a:avLst/>
+          </a:prstGeom>
+          <a:noFill/>
+        </p:spPr>
+        <p:txBody>
+          <a:bodyPr wrap="square" lIns="0" tIns="0" rIns="0" bIns="0" anchor="ctr">
+            <a:spAutoFit/>
+          </a:bodyPr>
+          <a:lstStyle/>
+          <a:p>
+            <a:pPr algn="ctr">
+              <a:spcBef>
+                <a:spcPts val="0"/>
+              </a:spcBef>
+              <a:spcAft>
+                <a:spcPts val="500"/>
+              </a:spcAft>
+            </a:pPr>
+            <a:r>
+              <a:rPr sz="1600" b="1" i="0">
+                <a:solidFill>
+                  <a:srgbClr val="FFFFFF"/>
+                </a:solidFill>
+                <a:latin typeface="Calibri"/>
+              </a:rPr>
+              <a:t>6</a:t>
+            </a:r>
+          </a:p>
+        </p:txBody>
+      </p:sp>
+      <p:sp>
+        <p:nvSpPr>
+          <p:cNvPr id="24" name="TextBox 23"/>
+          <p:cNvSpPr txBox="1"/>
+          <p:nvPr/>
+        </p:nvSpPr>
+        <p:spPr>
+          <a:xfrm>
+            <a:off x="1463040" y="5175496"/>
+            <a:ext cx="9875520" cy="411480"/>
+          </a:xfrm>
+          <a:prstGeom prst="rect">
+            <a:avLst/>
+          </a:prstGeom>
+          <a:noFill/>
+        </p:spPr>
+        <p:txBody>
+          <a:bodyPr wrap="square" lIns="0" tIns="0" rIns="0" bIns="0" anchor="t">
+            <a:spAutoFit/>
+          </a:bodyPr>
+          <a:lstStyle/>
+          <a:p>
+            <a:pPr algn="l">
+              <a:spcBef>
+                <a:spcPts val="0"/>
+              </a:spcBef>
+              <a:spcAft>
+                <a:spcPts val="500"/>
+              </a:spcAft>
+            </a:pPr>
+            <a:r>
+              <a:rPr sz="1600" b="0" i="0">
+                <a:solidFill>
+                  <a:srgbClr val="E7E3D7"/>
+                </a:solidFill>
+                <a:latin typeface="Calibri"/>
+              </a:rPr>
               <a:t>Run, then explore 2D / 3D / timeline / analysis</a:t>
+            </a:r>
+          </a:p>
+        </p:txBody>
+      </p:sp>
+    </p:spTree>
+  </p:cSld>
+  <p:clrMapOvr>
+    <a:masterClrMapping/>
+  </p:clrMapOvr>
+</p:sld>
+</file>
+
+<file path=ppt/slides/slide15.xml><?xml version="1.0" encoding="utf-8"?>
+<p:sld xmlns:a="http://schemas.openxmlformats.org/drawingml/2006/main" xmlns:r="http://schemas.openxmlformats.org/officeDocument/2006/relationships" xmlns:p="http://schemas.openxmlformats.org/presentationml/2006/main">
+  <p:cSld>
+    <p:spTree>
+      <p:nvGrpSpPr>
+        <p:cNvPr id="1" name=""/>
+        <p:cNvGrpSpPr/>
+        <p:nvPr/>
+      </p:nvGrpSpPr>
+      <p:grpSpPr>
+        <a:xfrm>
+          <a:off x="0" y="0"/>
+          <a:ext cx="0" cy="0"/>
+          <a:chOff x="0" y="0"/>
+          <a:chExt cx="0" cy="0"/>
+        </a:xfrm>
+      </p:grpSpPr>
+      <p:sp>
+        <p:nvSpPr>
+          <p:cNvPr id="2" name="Rectangle 1"/>
+          <p:cNvSpPr/>
+          <p:nvPr/>
+        </p:nvSpPr>
+        <p:spPr>
+          <a:xfrm>
+            <a:off x="0" y="0"/>
+            <a:ext cx="12191695" cy="6858000"/>
+          </a:xfrm>
+          <a:prstGeom prst="rect">
+            <a:avLst/>
+          </a:prstGeom>
+          <a:solidFill>
+            <a:srgbClr val="F2ECE0"/>
+          </a:solidFill>
+          <a:ln>
+            <a:noFill/>
+          </a:ln>
+          <a:effectLst/>
+        </p:spPr>
+        <p:style>
+          <a:lnRef idx="1">
+            <a:schemeClr val="accent1"/>
+          </a:lnRef>
+          <a:fillRef idx="3">
+            <a:schemeClr val="accent1"/>
+          </a:fillRef>
+          <a:effectRef idx="2">
+            <a:schemeClr val="accent1"/>
+          </a:effectRef>
+          <a:fontRef idx="minor">
+            <a:schemeClr val="lt1"/>
+          </a:fontRef>
+        </p:style>
+        <p:txBody>
+          <a:bodyPr rtlCol="0" anchor="ctr"/>
+          <a:lstStyle/>
+          <a:p>
+            <a:pPr algn="ctr"/>
+            <a:endParaRPr/>
+          </a:p>
+        </p:txBody>
+      </p:sp>
+      <p:sp>
+        <p:nvSpPr>
+          <p:cNvPr id="3" name="TextBox 2"/>
+          <p:cNvSpPr txBox="1"/>
+          <p:nvPr/>
+        </p:nvSpPr>
+        <p:spPr>
+          <a:xfrm>
+            <a:off x="640080" y="384048"/>
+            <a:ext cx="10058400" cy="365760"/>
+          </a:xfrm>
+          <a:prstGeom prst="rect">
+            <a:avLst/>
+          </a:prstGeom>
+          <a:noFill/>
+        </p:spPr>
+        <p:txBody>
+          <a:bodyPr wrap="square" lIns="0" tIns="0" rIns="0" bIns="0" anchor="t">
+            <a:spAutoFit/>
+          </a:bodyPr>
+          <a:lstStyle/>
+          <a:p>
+            <a:pPr algn="l">
+              <a:spcBef>
+                <a:spcPts val="0"/>
+              </a:spcBef>
+              <a:spcAft>
+                <a:spcPts val="500"/>
+              </a:spcAft>
+            </a:pPr>
+            <a:r>
+              <a:rPr sz="1250" b="1" i="0">
+                <a:solidFill>
+                  <a:srgbClr val="B85042"/>
+                </a:solidFill>
+                <a:latin typeface="Calibri"/>
+              </a:rPr>
+              <a:t>STEP 5 OF 6</a:t>
+            </a:r>
+          </a:p>
+        </p:txBody>
+      </p:sp>
+      <p:sp>
+        <p:nvSpPr>
+          <p:cNvPr id="4" name="TextBox 3"/>
+          <p:cNvSpPr txBox="1"/>
+          <p:nvPr/>
+        </p:nvSpPr>
+        <p:spPr>
+          <a:xfrm>
+            <a:off x="640080" y="676656"/>
+            <a:ext cx="10972800" cy="777240"/>
+          </a:xfrm>
+          <a:prstGeom prst="rect">
+            <a:avLst/>
+          </a:prstGeom>
+          <a:noFill/>
+        </p:spPr>
+        <p:txBody>
+          <a:bodyPr wrap="square" lIns="0" tIns="0" rIns="0" bIns="0" anchor="t">
+            <a:spAutoFit/>
+          </a:bodyPr>
+          <a:lstStyle/>
+          <a:p>
+            <a:pPr algn="l">
+              <a:spcBef>
+                <a:spcPts val="0"/>
+              </a:spcBef>
+              <a:spcAft>
+                <a:spcPts val="500"/>
+              </a:spcAft>
+            </a:pPr>
+            <a:r>
+              <a:rPr sz="3100" b="1" i="0">
+                <a:solidFill>
+                  <a:srgbClr val="2C4A3E"/>
+                </a:solidFill>
+                <a:latin typeface="Calibri"/>
+              </a:rPr>
+              <a:t>Choose Your Output Folder</a:t>
+            </a:r>
+          </a:p>
+        </p:txBody>
+      </p:sp>
+      <p:sp>
+        <p:nvSpPr>
+          <p:cNvPr id="5" name="Oval 4"/>
+          <p:cNvSpPr/>
+          <p:nvPr/>
+        </p:nvSpPr>
+        <p:spPr>
+          <a:xfrm>
+            <a:off x="10881360" y="457200"/>
+            <a:ext cx="640080" cy="640080"/>
+          </a:xfrm>
+          <a:prstGeom prst="ellipse">
+            <a:avLst/>
+          </a:prstGeom>
+          <a:solidFill>
+            <a:srgbClr val="3E6B8C"/>
+          </a:solidFill>
+          <a:ln>
+            <a:noFill/>
+          </a:ln>
+          <a:effectLst/>
+        </p:spPr>
+        <p:style>
+          <a:lnRef idx="1">
+            <a:schemeClr val="accent1"/>
+          </a:lnRef>
+          <a:fillRef idx="3">
+            <a:schemeClr val="accent1"/>
+          </a:fillRef>
+          <a:effectRef idx="2">
+            <a:schemeClr val="accent1"/>
+          </a:effectRef>
+          <a:fontRef idx="minor">
+            <a:schemeClr val="lt1"/>
+          </a:fontRef>
+        </p:style>
+        <p:txBody>
+          <a:bodyPr rtlCol="0" anchor="ctr"/>
+          <a:lstStyle/>
+          <a:p>
+            <a:pPr algn="ctr"/>
+            <a:endParaRPr/>
+          </a:p>
+        </p:txBody>
+      </p:sp>
+      <p:sp>
+        <p:nvSpPr>
+          <p:cNvPr id="6" name="TextBox 5"/>
+          <p:cNvSpPr txBox="1"/>
+          <p:nvPr/>
+        </p:nvSpPr>
+        <p:spPr>
+          <a:xfrm>
+            <a:off x="10881360" y="457200"/>
+            <a:ext cx="640080" cy="640080"/>
+          </a:xfrm>
+          <a:prstGeom prst="rect">
+            <a:avLst/>
+          </a:prstGeom>
+          <a:noFill/>
+        </p:spPr>
+        <p:txBody>
+          <a:bodyPr wrap="square" lIns="0" tIns="0" rIns="0" bIns="0" anchor="ctr">
+            <a:spAutoFit/>
+          </a:bodyPr>
+          <a:lstStyle/>
+          <a:p>
+            <a:pPr algn="ctr">
+              <a:spcBef>
+                <a:spcPts val="0"/>
+              </a:spcBef>
+              <a:spcAft>
+                <a:spcPts val="500"/>
+              </a:spcAft>
+            </a:pPr>
+            <a:r>
+              <a:rPr sz="2600" b="1" i="0">
+                <a:solidFill>
+                  <a:srgbClr val="FFFFFF"/>
+                </a:solidFill>
+                <a:latin typeface="Calibri"/>
+              </a:rPr>
+              <a:t>5</a:t>
+            </a:r>
+          </a:p>
+        </p:txBody>
+      </p:sp>
+      <p:sp>
+        <p:nvSpPr>
+          <p:cNvPr id="7" name="TextBox 6"/>
+          <p:cNvSpPr txBox="1"/>
+          <p:nvPr/>
+        </p:nvSpPr>
+        <p:spPr>
+          <a:xfrm>
+            <a:off x="640080" y="1600200"/>
+            <a:ext cx="6400800" cy="3657600"/>
+          </a:xfrm>
+          <a:prstGeom prst="rect">
+            <a:avLst/>
+          </a:prstGeom>
+          <a:noFill/>
+        </p:spPr>
+        <p:txBody>
+          <a:bodyPr wrap="square" lIns="0" tIns="0" rIns="0" bIns="0">
+            <a:spAutoFit/>
+          </a:bodyPr>
+          <a:lstStyle/>
+          <a:p>
+            <a:pPr>
+              <a:spcBef>
+                <a:spcPts val="0"/>
+              </a:spcBef>
+              <a:spcAft>
+                <a:spcPts val="1000"/>
+              </a:spcAft>
+            </a:pPr>
+            <a:r>
+              <a:rPr sz="1050" b="1">
+                <a:solidFill>
+                  <a:srgbClr val="B85042"/>
+                </a:solidFill>
+                <a:latin typeface="Calibri"/>
+              </a:rPr>
+              <a:t>●  </a:t>
+            </a:r>
+            <a:r>
+              <a:rPr sz="1450" b="1">
+                <a:solidFill>
+                  <a:srgbClr val="2C4A3E"/>
+                </a:solidFill>
+                <a:latin typeface="Calibri"/>
+              </a:rPr>
+              <a:t>It's its own step now. </a:t>
+            </a:r>
+            <a:r>
+              <a:rPr sz="1450">
+                <a:solidFill>
+                  <a:srgbClr val="2B2B2B"/>
+                </a:solidFill>
+                <a:latin typeface="Calibri"/>
+              </a:rPr>
+              <a:t>Output Folder is a separate section at the end of setup, after you've picked your processes — not bundled with the DEM.</a:t>
+            </a:r>
+          </a:p>
+          <a:p>
+            <a:pPr>
+              <a:spcBef>
+                <a:spcPts val="0"/>
+              </a:spcBef>
+              <a:spcAft>
+                <a:spcPts val="1000"/>
+              </a:spcAft>
+            </a:pPr>
+            <a:r>
+              <a:rPr sz="1050" b="1">
+                <a:solidFill>
+                  <a:srgbClr val="B85042"/>
+                </a:solidFill>
+                <a:latin typeface="Calibri"/>
+              </a:rPr>
+              <a:t>●  </a:t>
+            </a:r>
+            <a:r>
+              <a:rPr sz="1450" b="1">
+                <a:solidFill>
+                  <a:srgbClr val="2C4A3E"/>
+                </a:solidFill>
+                <a:latin typeface="Calibri"/>
+              </a:rPr>
+              <a:t>Pre-filled for you. </a:t>
+            </a:r>
+            <a:r>
+              <a:rPr sz="1450">
+                <a:solidFill>
+                  <a:srgbClr val="2B2B2B"/>
+                </a:solidFill>
+                <a:latin typeface="Calibri"/>
+              </a:rPr>
+              <a:t>Defaults to the app's own outputs location, or whichever folder you used last time.</a:t>
+            </a:r>
+          </a:p>
+          <a:p>
+            <a:pPr>
+              <a:spcBef>
+                <a:spcPts val="0"/>
+              </a:spcBef>
+              <a:spcAft>
+                <a:spcPts val="1000"/>
+              </a:spcAft>
+            </a:pPr>
+            <a:r>
+              <a:rPr sz="1050" b="1">
+                <a:solidFill>
+                  <a:srgbClr val="B85042"/>
+                </a:solidFill>
+                <a:latin typeface="Calibri"/>
+              </a:rPr>
+              <a:t>●  </a:t>
+            </a:r>
+            <a:r>
+              <a:rPr sz="1450" b="1">
+                <a:solidFill>
+                  <a:srgbClr val="2C4A3E"/>
+                </a:solidFill>
+                <a:latin typeface="Calibri"/>
+              </a:rPr>
+              <a:t>Browse to redirect it. </a:t>
+            </a:r>
+            <a:r>
+              <a:rPr sz="1450">
+                <a:solidFill>
+                  <a:srgbClr val="2B2B2B"/>
+                </a:solidFill>
+                <a:latin typeface="Calibri"/>
+              </a:rPr>
+              <a:t>Pick anywhere on your filesystem; each run writes to a numbered simulation_&lt;N&gt;/ subfolder inside it.</a:t>
+            </a:r>
+          </a:p>
+        </p:txBody>
+      </p:sp>
+      <p:sp>
+        <p:nvSpPr>
+          <p:cNvPr id="8" name="Rounded Rectangle 7"/>
+          <p:cNvSpPr/>
+          <p:nvPr/>
+        </p:nvSpPr>
+        <p:spPr>
+          <a:xfrm>
+            <a:off x="7406640" y="1600200"/>
+            <a:ext cx="4114800" cy="3840480"/>
+          </a:xfrm>
+          <a:prstGeom prst="roundRect">
+            <a:avLst>
+              <a:gd name="adj" fmla="val 10000"/>
+            </a:avLst>
+          </a:prstGeom>
+          <a:solidFill>
+            <a:srgbClr val="2C4A3E"/>
+          </a:solidFill>
+          <a:ln>
+            <a:noFill/>
+          </a:ln>
+          <a:effectLst/>
+        </p:spPr>
+        <p:style>
+          <a:lnRef idx="1">
+            <a:schemeClr val="accent1"/>
+          </a:lnRef>
+          <a:fillRef idx="3">
+            <a:schemeClr val="accent1"/>
+          </a:fillRef>
+          <a:effectRef idx="2">
+            <a:schemeClr val="accent1"/>
+          </a:effectRef>
+          <a:fontRef idx="minor">
+            <a:schemeClr val="lt1"/>
+          </a:fontRef>
+        </p:style>
+        <p:txBody>
+          <a:bodyPr rtlCol="0" anchor="ctr"/>
+          <a:lstStyle/>
+          <a:p>
+            <a:pPr algn="ctr"/>
+            <a:endParaRPr/>
+          </a:p>
+        </p:txBody>
+      </p:sp>
+      <p:sp>
+        <p:nvSpPr>
+          <p:cNvPr id="9" name="TextBox 8"/>
+          <p:cNvSpPr txBox="1"/>
+          <p:nvPr/>
+        </p:nvSpPr>
+        <p:spPr>
+          <a:xfrm>
+            <a:off x="7680960" y="1810512"/>
+            <a:ext cx="3566160" cy="457200"/>
+          </a:xfrm>
+          <a:prstGeom prst="rect">
+            <a:avLst/>
+          </a:prstGeom>
+          <a:noFill/>
+        </p:spPr>
+        <p:txBody>
+          <a:bodyPr wrap="square" lIns="0" tIns="0" rIns="0" bIns="0" anchor="t">
+            <a:spAutoFit/>
+          </a:bodyPr>
+          <a:lstStyle/>
+          <a:p>
+            <a:pPr algn="l">
+              <a:spcBef>
+                <a:spcPts val="0"/>
+              </a:spcBef>
+              <a:spcAft>
+                <a:spcPts val="500"/>
+              </a:spcAft>
+            </a:pPr>
+            <a:r>
+              <a:rPr sz="1300" b="1" i="0">
+                <a:solidFill>
+                  <a:srgbClr val="9CC486"/>
+                </a:solidFill>
+                <a:latin typeface="Calibri"/>
+              </a:rPr>
+              <a:t>GOOD TO KNOW</a:t>
+            </a:r>
+          </a:p>
+        </p:txBody>
+      </p:sp>
+      <p:sp>
+        <p:nvSpPr>
+          <p:cNvPr id="10" name="TextBox 9"/>
+          <p:cNvSpPr txBox="1"/>
+          <p:nvPr/>
+        </p:nvSpPr>
+        <p:spPr>
+          <a:xfrm>
+            <a:off x="7680960" y="2286000"/>
+            <a:ext cx="3566160" cy="3017520"/>
+          </a:xfrm>
+          <a:prstGeom prst="rect">
+            <a:avLst/>
+          </a:prstGeom>
+          <a:noFill/>
+        </p:spPr>
+        <p:txBody>
+          <a:bodyPr wrap="square" lIns="0" tIns="0" rIns="0" bIns="0" anchor="t">
+            <a:spAutoFit/>
+          </a:bodyPr>
+          <a:lstStyle/>
+          <a:p>
+            <a:pPr algn="l">
+              <a:spcBef>
+                <a:spcPts val="0"/>
+              </a:spcBef>
+              <a:spcAft>
+                <a:spcPts val="300"/>
+              </a:spcAft>
+            </a:pPr>
+            <a:r>
+              <a:rPr sz="1350" b="0" i="0">
+                <a:solidFill>
+                  <a:srgbClr val="E7E3D7"/>
+                </a:solidFill>
+                <a:latin typeface="Calibri"/>
+              </a:rPr>
+              <a:t>Numbering is per-folder. simulation_1, simulation_2, … count independently for each output folder you pick.</a:t>
+            </a:r>
+          </a:p>
+          <a:p>
+            <a:pPr algn="l">
+              <a:spcBef>
+                <a:spcPts val="0"/>
+              </a:spcBef>
+              <a:spcAft>
+                <a:spcPts val="300"/>
+              </a:spcAft>
+            </a:pPr>
+            <a:endParaRPr sz="1350" b="0" i="0">
+              <a:solidFill>
+                <a:srgbClr val="E7E3D7"/>
+              </a:solidFill>
+              <a:latin typeface="Calibri"/>
+            </a:endParaRPr>
+          </a:p>
+          <a:p>
+            <a:pPr algn="l">
+              <a:spcBef>
+                <a:spcPts val="0"/>
+              </a:spcBef>
+              <a:spcAft>
+                <a:spcPts val="300"/>
+              </a:spcAft>
+            </a:pPr>
+            <a:r>
+              <a:rPr sz="1350" b="0" i="0">
+                <a:solidFill>
+                  <a:srgbClr val="E7E3D7"/>
+                </a:solidFill>
+                <a:latin typeface="Calibri"/>
+              </a:rPr>
+              <a:t>Nothing runs yet. Changing this folder doesn't start anything — it just decides where the next run will land.</a:t>
+            </a:r>
+          </a:p>
+          <a:p>
+            <a:pPr algn="l">
+              <a:spcBef>
+                <a:spcPts val="0"/>
+              </a:spcBef>
+              <a:spcAft>
+                <a:spcPts val="300"/>
+              </a:spcAft>
+            </a:pPr>
+            <a:endParaRPr sz="1350" b="0" i="0">
+              <a:solidFill>
+                <a:srgbClr val="E7E3D7"/>
+              </a:solidFill>
+              <a:latin typeface="Calibri"/>
+            </a:endParaRPr>
+          </a:p>
+          <a:p>
+            <a:pPr algn="l">
+              <a:spcBef>
+                <a:spcPts val="0"/>
+              </a:spcBef>
+              <a:spcAft>
+                <a:spcPts val="300"/>
+              </a:spcAft>
+            </a:pPr>
+            <a:r>
+              <a:rPr sz="1350" b="0" i="0">
+                <a:solidFill>
+                  <a:srgbClr val="E7E3D7"/>
+                </a:solidFill>
+                <a:latin typeface="Calibri"/>
+              </a:rPr>
+              <a:t>Revisit it anytime before pressing Run Simulation on the next step.</a:t>
             </a:r>
           </a:p>
         </p:txBody>
@@ -10731,7 +11437,7 @@
                 </a:solidFill>
                 <a:latin typeface="Calibri"/>
               </a:rPr>
-              <a:t>Choose your DEM &amp; output folder, run length, and the forces (components) to apply.</a:t>
+              <a:t>Choose your DEM, run length, and the processes to apply — then pick where results are saved.</a:t>
             </a:r>
           </a:p>
         </p:txBody>
@@ -11145,7 +11851,7 @@
                 </a:solidFill>
                 <a:latin typeface="Calibri"/>
               </a:rPr>
-              <a:t>STEP 1 OF 5</a:t>
+              <a:t>STEP 1 OF 6</a:t>
             </a:r>
           </a:p>
         </p:txBody>
@@ -11187,7 +11893,7 @@
                 </a:solidFill>
                 <a:latin typeface="Calibri"/>
               </a:rPr>
-              <a:t>Pick Your DEM &amp; Output Folder</a:t>
+              <a:t>Pick Your DEM</a:t>
             </a:r>
           </a:p>
         </p:txBody>
@@ -11335,43 +12041,6 @@
                 <a:latin typeface="Calibri"/>
               </a:rPr>
               <a:t>Select a GeoTIFF (.tif) elevation map from your own filesystem — this is the DEM the simulation will run on.</a:t>
-            </a:r>
-          </a:p>
-          <a:p>
-            <a:pPr>
-              <a:spcBef>
-                <a:spcPts val="0"/>
-              </a:spcBef>
-              <a:spcAft>
-                <a:spcPts val="1000"/>
-              </a:spcAft>
-            </a:pPr>
-            <a:r>
-              <a:rPr sz="1050" b="1">
-                <a:solidFill>
-                  <a:srgbClr val="B85042"/>
-                </a:solidFill>
-                <a:latin typeface="Calibri"/>
-              </a:rPr>
-              <a:t>●  </a:t>
-            </a:r>
-            <a:r>
-              <a:rPr sz="1450" b="1">
-                <a:solidFill>
-                  <a:srgbClr val="2C4A3E"/>
-                </a:solidFill>
-                <a:latin typeface="Calibri"/>
-              </a:rPr>
-              <a:t>Choose an output folder. </a:t>
-            </a:r>
-            <a:r>
-              <a:rPr sz="1450">
-                <a:solidFill>
-                  <a:srgbClr val="2B2B2B"/>
-                </a:solidFill>
-                <a:latin typeface="Calibri"/>
-              </a:rPr>
-              <a:t>Pre-filled with the app's default location (or your last choice) — Browse to save this run's results somewhere else.</a:t>
             </a:r>
           </a:p>
           <a:p>
@@ -11721,7 +12390,7 @@
                 </a:solidFill>
                 <a:latin typeface="Calibri"/>
               </a:rPr>
-              <a:t>STEP 2 OF 5</a:t>
+              <a:t>STEP 2 OF 6</a:t>
             </a:r>
           </a:p>
         </p:txBody>
@@ -12487,7 +13156,7 @@
                 </a:solidFill>
                 <a:latin typeface="Calibri"/>
               </a:rPr>
-              <a:t>STEP 3 OF 5  ·  OPTIONAL</a:t>
+              <a:t>STEP 3 OF 6  ·  OPTIONAL</a:t>
             </a:r>
           </a:p>
         </p:txBody>
@@ -13100,7 +13769,7 @@
                 </a:solidFill>
                 <a:latin typeface="Calibri"/>
               </a:rPr>
-              <a:t>STEP 4 OF 5</a:t>
+              <a:t>STEP 4 OF 6</a:t>
             </a:r>
           </a:p>
         </p:txBody>
@@ -13142,7 +13811,7 @@
                 </a:solidFill>
                 <a:latin typeface="Calibri"/>
               </a:rPr>
-              <a:t>Add the Forces (Components)</a:t>
+              <a:t>Add the Forces (Processes)</a:t>
             </a:r>
           </a:p>
         </p:txBody>
@@ -13271,7 +13940,7 @@
                 </a:solidFill>
                 <a:latin typeface="Calibri"/>
               </a:rPr>
-              <a:t>Use Add Component to pick which natural processes to switch on, and configure each one's settings. Mix and match them like ingredients. (Each component is explained in the Component Manual.)</a:t>
+              <a:t>Use + Add Process to pick which natural processes to switch on, and configure each one's settings. Mix and match them like ingredients. (Each process is explained in the Component Manual.)</a:t>
             </a:r>
           </a:p>
         </p:txBody>
@@ -13360,7 +14029,7 @@
                 </a:solidFill>
                 <a:latin typeface="Calibri"/>
               </a:rPr>
-              <a:t>🌧 Precipitation</a:t>
+              <a:t>🌧 Rainfall &amp; Runoff</a:t>
             </a:r>
           </a:p>
         </p:txBody>
@@ -13491,7 +14160,7 @@
                 </a:solidFill>
                 <a:latin typeface="Calibri"/>
               </a:rPr>
-              <a:t>🌿 Vegetation</a:t>
+              <a:t>🌿 Vegetation Cover</a:t>
             </a:r>
           </a:p>
         </p:txBody>
@@ -13622,7 +14291,7 @@
                 </a:solidFill>
                 <a:latin typeface="Calibri"/>
               </a:rPr>
-              <a:t>💧 Flow Accumulator</a:t>
+              <a:t>💧 Water Flow Routing</a:t>
             </a:r>
           </a:p>
         </p:txBody>
@@ -13753,7 +14422,7 @@
                 </a:solidFill>
                 <a:latin typeface="Calibri"/>
               </a:rPr>
-              <a:t>⛰ Hillslope Diffuser</a:t>
+              <a:t>⛰ Hillslope Soil Creep</a:t>
             </a:r>
           </a:p>
         </p:txBody>
@@ -13878,13 +14547,13 @@
               </a:spcAft>
             </a:pPr>
             <a:r>
-              <a:rPr sz="1400" b="1" i="0">
+              <a:rPr sz="1050" b="1" i="0">
                 <a:solidFill>
                   <a:srgbClr val="2C4A3E"/>
                 </a:solidFill>
                 <a:latin typeface="Calibri"/>
               </a:rPr>
-              <a:t>🌊 SPACE Eroder</a:t>
+              <a:t>🌊 Erosion &amp; Sediment Transport</a:t>
             </a:r>
           </a:p>
         </p:txBody>
@@ -13926,7 +14595,7 @@
                 </a:solidFill>
                 <a:latin typeface="Calibri"/>
               </a:rPr>
-              <a:t>river erosion</a:t>
+              <a:t>erosion</a:t>
             </a:r>
           </a:p>
         </p:txBody>
@@ -14015,7 +14684,7 @@
                 </a:solidFill>
                 <a:latin typeface="Calibri"/>
               </a:rPr>
-              <a:t>🪨 Lithology</a:t>
+              <a:t>🪨 Rock Layers</a:t>
             </a:r>
           </a:p>
         </p:txBody>
@@ -14057,7 +14726,7 @@
                 </a:solidFill>
                 <a:latin typeface="Calibri"/>
               </a:rPr>
-              <a:t>rock layers</a:t>
+              <a:t>geology</a:t>
             </a:r>
           </a:p>
         </p:txBody>
@@ -14146,7 +14815,7 @@
                 </a:solidFill>
                 <a:latin typeface="Calibri"/>
               </a:rPr>
-              <a:t>↑ Tectonics</a:t>
+              <a:t>↑ Tectonic Uplift</a:t>
             </a:r>
           </a:p>
         </p:txBody>
@@ -14277,7 +14946,7 @@
                 </a:solidFill>
                 <a:latin typeface="Calibri"/>
               </a:rPr>
-              <a:t>⚠  Precipitation, Vegetation &amp; the eroders need a Flow Accumulator to take effect.</a:t>
+              <a:t>⚠  Rainfall &amp; Runoff, Vegetation Cover &amp; the Erosion processes need Water Flow Routing to take effect — flagged “Required” in the app.</a:t>
             </a:r>
           </a:p>
         </p:txBody>
@@ -14389,7 +15058,7 @@
                 </a:solidFill>
                 <a:latin typeface="Calibri"/>
               </a:rPr>
-              <a:t>STEP 5 OF 5</a:t>
+              <a:t>STEP 6 OF 6</a:t>
             </a:r>
           </a:p>
         </p:txBody>
@@ -14518,7 +15187,7 @@
                 </a:solidFill>
                 <a:latin typeface="Calibri"/>
               </a:rPr>
-              <a:t>5</a:t>
+              <a:t>6</a:t>
             </a:r>
           </a:p>
         </p:txBody>
@@ -14578,7 +15247,7 @@
                 </a:solidFill>
                 <a:latin typeface="Calibri"/>
               </a:rPr>
-              <a:t>The engine steps through time, applying every component each step on the shared landscape.</a:t>
+              <a:t>The engine steps through time, applying every process each step on the shared landscape.</a:t>
             </a:r>
           </a:p>
           <a:p>
@@ -14839,7 +15508,7 @@
                 </a:solidFill>
                 <a:latin typeface="Calibri"/>
               </a:rPr>
-              <a:t>rain → plants → water routing → hillslope creep → river erosion → rock update → uplift.</a:t>
+              <a:t>rain → plants → water routing → hillslope creep → erosion → rock update → uplift.</a:t>
             </a:r>
           </a:p>
           <a:p>
